--- a/public/fun/pack/pptx/talkpro/발표템플릿프리미엄_39_모임·동호회소개_미드나잇실버.pptx
+++ b/public/fun/pack/pptx/talkpro/발표템플릿프리미엄_39_모임·동호회소개_미드나잇실버.pptx
@@ -115,12 +115,12 @@
   <p:extLst>
     <p:ext uri="{521415D9-36F7-43E2-AB2F-B90AF26B5E84}">
       <p14:sectionLst xmlns:p14="http://schemas.microsoft.com/office/powerpoint/2010/main">
-        <p14:section name="시작" id="{0334048A-9775-4A10-8B65-6034C6900418}">
+        <p14:section name="시작" id="{2D6135EC-472E-428E-BC3C-F9F4021FF7DC}">
           <p14:sldIdLst>
             <p14:sldId id="256"/>
           </p14:sldIdLst>
         </p14:section>
-        <p14:section name="본문" id="{A69051FB-8EEF-4046-A4DB-89B6A4CD0716}">
+        <p14:section name="본문" id="{FEC21A4E-4EFC-486B-8955-85973E7EC307}">
           <p14:sldIdLst>
             <p14:sldId id="257"/>
             <p14:sldId id="258"/>
@@ -131,7 +131,7 @@
             <p14:sldId id="263"/>
           </p14:sldIdLst>
         </p14:section>
-        <p14:section name="마무리" id="{461FDF4F-7A69-483B-870B-F863343644DC}">
+        <p14:section name="마무리" id="{1036CD67-06E5-4ADB-A2EF-70E9FD2D3E5A}">
           <p14:sldIdLst>
             <p14:sldId id="264"/>
           </p14:sldIdLst>
@@ -3350,7 +3350,7 @@
             </a:lvl1pPr>
           </a:lstStyle>
           <a:p>
-            <a:fld id="{807EE13B-EACA-44E9-A1FD-DB10BCDBB4D1}" type="slidenum">
+            <a:fld id="{83AA4BD5-5695-480F-AEDA-31D3D71D5968}" type="slidenum">
               <a:rPr lang="en-US"/>
               <a:t>‹#›</a:t>
             </a:fld>
@@ -5544,7 +5544,7 @@
             </a:lvl1pPr>
           </a:lstStyle>
           <a:p>
-            <a:fld id="{BB8A7B53-2217-4B31-9C46-AD9E3B1CABCF}" type="slidenum">
+            <a:fld id="{DBDA56BC-F86C-41ED-8CA5-8B0E8BAD9095}" type="slidenum">
               <a:rPr lang="en-US"/>
               <a:t>‹#›</a:t>
             </a:fld>
@@ -6290,7 +6290,7 @@
             </a:lvl1pPr>
           </a:lstStyle>
           <a:p>
-            <a:fld id="{AD72D7E2-2D91-4484-AC10-5C3387DC4A39}" type="slidenum">
+            <a:fld id="{C1562AEC-BDC2-4570-B24A-D014D2BD02D9}" type="slidenum">
               <a:rPr lang="en-US"/>
               <a:t>‹#›</a:t>
             </a:fld>
@@ -7153,7 +7153,7 @@
           <a:p>
             <a:r>
               <a:rPr lang="ko-KR"/>
-              <a:t>올해 새로 오신 분들께 인사드립니다</a:t>
+              <a:t>새로 오신 분들께 인사드립니다</a:t>
             </a:r>
           </a:p>
         </p:txBody>
@@ -7181,7 +7181,7 @@
           <a:p>
             <a:r>
               <a:rPr lang="ko-KR"/>
-              <a:t>0000. 00. 00</a:t>
+              <a:t>날짜 입력</a:t>
             </a:r>
           </a:p>
         </p:txBody>
@@ -7288,7 +7288,7 @@
           <a:bodyPr/>
           <a:lstStyle/>
           <a:p>
-            <a:fld id="{9021ECB4-5991-4C5F-9130-B9A6CF422522}" type="slidenum">
+            <a:fld id="{514D90D4-9D80-483C-AC2D-9BEEC7B7662E}" type="slidenum">
               <a:rPr lang="en-US"/>
               <a:t>‹#›</a:t>
             </a:fld>
@@ -8508,7 +8508,7 @@
           <a:bodyPr/>
           <a:lstStyle/>
           <a:p>
-            <a:fld id="{3DB7DA8A-E628-4A02-A567-2CE5B08704B5}" type="slidenum">
+            <a:fld id="{7F224B82-D489-4E08-AE3D-56845C7FBAEC}" type="slidenum">
               <a:rPr lang="en-US"/>
               <a:t>‹#›</a:t>
             </a:fld>
@@ -8618,7 +8618,7 @@
           <a:bodyPr/>
           <a:lstStyle/>
           <a:p>
-            <a:fld id="{EB5EB515-1120-43B1-AA1E-F8C98AC1274B}" type="slidenum">
+            <a:fld id="{52B90BBD-1304-4C48-993E-F3BE099323FB}" type="slidenum">
               <a:rPr lang="en-US"/>
               <a:t>‹#›</a:t>
             </a:fld>
@@ -9610,7 +9610,7 @@
           <a:bodyPr/>
           <a:lstStyle/>
           <a:p>
-            <a:fld id="{3C60BEBD-EB2D-4079-B982-3D069DB7C8F3}" type="slidenum">
+            <a:fld id="{E26F748F-5D9F-4309-AD8F-04FCA7BB4F20}" type="slidenum">
               <a:rPr lang="en-US"/>
               <a:t>‹#›</a:t>
             </a:fld>
@@ -10284,7 +10284,7 @@
           <a:bodyPr/>
           <a:lstStyle/>
           <a:p>
-            <a:fld id="{623F259C-0E92-4E21-A1D4-3AE6E29AB142}" type="slidenum">
+            <a:fld id="{AD261C85-6BD9-44BD-A92F-97E6915CA9D3}" type="slidenum">
               <a:rPr lang="en-US"/>
               <a:t>‹#›</a:t>
             </a:fld>
@@ -10486,7 +10486,7 @@
           <a:bodyPr/>
           <a:lstStyle/>
           <a:p>
-            <a:fld id="{0B36FF31-235C-497F-A443-2E3496B17C44}" type="slidenum">
+            <a:fld id="{5F5E79EA-2ADD-4AB7-AC7D-014D9EBEC0A2}" type="slidenum">
               <a:rPr lang="en-US"/>
               <a:t>‹#›</a:t>
             </a:fld>
@@ -11572,7 +11572,7 @@
           <a:bodyPr/>
           <a:lstStyle/>
           <a:p>
-            <a:fld id="{87D00848-7944-4DBB-BC40-5B76A63472EF}" type="slidenum">
+            <a:fld id="{BDB46E55-36DE-436E-9DD1-F88C42796C00}" type="slidenum">
               <a:rPr lang="en-US"/>
               <a:t>‹#›</a:t>
             </a:fld>
